--- a/Project Proposal.pptx
+++ b/Project Proposal.pptx
@@ -6883,7 +6883,7 @@
         </p:blipFill>
         <p:spPr>
           <a:xfrm>
-            <a:off x="42755" y="-45836"/>
+            <a:off x="6659" y="2292"/>
             <a:ext cx="9143990" cy="5143500"/>
           </a:xfrm>
           <a:prstGeom prst="rect">
@@ -7222,7 +7222,7 @@
                 <a:cs typeface="Roboto"/>
                 <a:sym typeface="Roboto"/>
               </a:rPr>
-              <a:t>To innovate the system</a:t>
+              <a:t>To innovate the system (from physical store to online selling)</a:t>
             </a:r>
           </a:p>
           <a:p>
@@ -7482,127 +7482,13 @@
                 <a:cs typeface="Montserrat"/>
                 <a:sym typeface="Montserrat"/>
               </a:rPr>
-              <a:t>Define Deliverables and Goals</a:t>
+              <a:t>Deliverables and Goals</a:t>
             </a:r>
             <a:endParaRPr sz="2400" b="1" dirty="0">
               <a:latin typeface="Montserrat"/>
               <a:ea typeface="Montserrat"/>
               <a:cs typeface="Montserrat"/>
               <a:sym typeface="Montserrat"/>
-            </a:endParaRPr>
-          </a:p>
-        </p:txBody>
-      </p:sp>
-      <p:sp>
-        <p:nvSpPr>
-          <p:cNvPr id="69" name="Google Shape;69;p14"/>
-          <p:cNvSpPr txBox="1"/>
-          <p:nvPr/>
-        </p:nvSpPr>
-        <p:spPr>
-          <a:xfrm>
-            <a:off x="514350" y="1515375"/>
-            <a:ext cx="7601100" cy="1046410"/>
-          </a:xfrm>
-          <a:prstGeom prst="rect">
-            <a:avLst/>
-          </a:prstGeom>
-          <a:noFill/>
-          <a:ln>
-            <a:noFill/>
-          </a:ln>
-        </p:spPr>
-        <p:txBody>
-          <a:bodyPr spcFirstLastPara="1" wrap="square" lIns="91425" tIns="91425" rIns="91425" bIns="91425" anchor="t" anchorCtr="0">
-            <a:spAutoFit/>
-          </a:bodyPr>
-          <a:lstStyle/>
-          <a:p>
-            <a:pPr marL="457200" lvl="0" indent="-317500" algn="l" rtl="0">
-              <a:spcBef>
-                <a:spcPts val="0"/>
-              </a:spcBef>
-              <a:spcAft>
-                <a:spcPts val="0"/>
-              </a:spcAft>
-              <a:buSzPts val="1400"/>
-              <a:buFont typeface="Roboto"/>
-              <a:buChar char="●"/>
-            </a:pPr>
-            <a:r>
-              <a:rPr lang="en-PH" dirty="0">
-                <a:latin typeface="Roboto"/>
-                <a:ea typeface="Roboto"/>
-                <a:cs typeface="Roboto"/>
-                <a:sym typeface="Roboto"/>
-              </a:rPr>
-              <a:t>Present  the project timeline</a:t>
-            </a:r>
-            <a:endParaRPr dirty="0">
-              <a:latin typeface="Roboto"/>
-              <a:ea typeface="Roboto"/>
-              <a:cs typeface="Roboto"/>
-              <a:sym typeface="Roboto"/>
-            </a:endParaRPr>
-          </a:p>
-          <a:p>
-            <a:pPr marL="457200" lvl="0" indent="-317500" algn="l" rtl="0">
-              <a:spcBef>
-                <a:spcPts val="0"/>
-              </a:spcBef>
-              <a:spcAft>
-                <a:spcPts val="0"/>
-              </a:spcAft>
-              <a:buSzPts val="1400"/>
-              <a:buFont typeface="Roboto"/>
-              <a:buChar char="●"/>
-            </a:pPr>
-            <a:r>
-              <a:rPr lang="en" dirty="0">
-                <a:latin typeface="Roboto"/>
-                <a:ea typeface="Roboto"/>
-                <a:cs typeface="Roboto"/>
-                <a:sym typeface="Roboto"/>
-              </a:rPr>
-              <a:t>Set goals that align with the deliverables you’re producing</a:t>
-            </a:r>
-          </a:p>
-          <a:p>
-            <a:pPr marL="457200" lvl="0" indent="-317500" algn="l" rtl="0">
-              <a:spcBef>
-                <a:spcPts val="0"/>
-              </a:spcBef>
-              <a:spcAft>
-                <a:spcPts val="0"/>
-              </a:spcAft>
-              <a:buSzPts val="1400"/>
-              <a:buFont typeface="Roboto"/>
-              <a:buChar char="●"/>
-            </a:pPr>
-            <a:endParaRPr dirty="0">
-              <a:latin typeface="Roboto"/>
-              <a:ea typeface="Roboto"/>
-              <a:cs typeface="Roboto"/>
-              <a:sym typeface="Roboto"/>
-            </a:endParaRPr>
-          </a:p>
-          <a:p>
-            <a:pPr marL="457200" lvl="0" indent="-317500" algn="l" rtl="0">
-              <a:spcBef>
-                <a:spcPts val="0"/>
-              </a:spcBef>
-              <a:spcAft>
-                <a:spcPts val="0"/>
-              </a:spcAft>
-              <a:buSzPts val="1400"/>
-              <a:buFont typeface="Roboto"/>
-              <a:buChar char="●"/>
-            </a:pPr>
-            <a:endParaRPr b="1" dirty="0">
-              <a:latin typeface="Roboto"/>
-              <a:ea typeface="Roboto"/>
-              <a:cs typeface="Roboto"/>
-              <a:sym typeface="Roboto"/>
             </a:endParaRPr>
           </a:p>
         </p:txBody>
@@ -7681,6 +7567,212 @@
           </a:ln>
         </p:spPr>
       </p:pic>
+      <p:sp>
+        <p:nvSpPr>
+          <p:cNvPr id="3" name="Google Shape;69;p14">
+            <a:extLst>
+              <a:ext uri="{FF2B5EF4-FFF2-40B4-BE49-F238E27FC236}">
+                <a16:creationId xmlns:a16="http://schemas.microsoft.com/office/drawing/2014/main" id="{AEAEC56C-8E86-5619-3BFF-4892416EDE25}"/>
+              </a:ext>
+            </a:extLst>
+          </p:cNvPr>
+          <p:cNvSpPr txBox="1"/>
+          <p:nvPr/>
+        </p:nvSpPr>
+        <p:spPr>
+          <a:xfrm>
+            <a:off x="724650" y="1807786"/>
+            <a:ext cx="7601100" cy="2123628"/>
+          </a:xfrm>
+          <a:prstGeom prst="rect">
+            <a:avLst/>
+          </a:prstGeom>
+          <a:noFill/>
+          <a:ln>
+            <a:noFill/>
+          </a:ln>
+        </p:spPr>
+        <p:txBody>
+          <a:bodyPr spcFirstLastPara="1" wrap="square" lIns="91425" tIns="91425" rIns="91425" bIns="91425" anchor="t" anchorCtr="0">
+            <a:spAutoFit/>
+          </a:bodyPr>
+          <a:lstStyle/>
+          <a:p>
+            <a:pPr marL="139700" lvl="0" algn="l" rtl="0">
+              <a:spcBef>
+                <a:spcPts val="0"/>
+              </a:spcBef>
+              <a:spcAft>
+                <a:spcPts val="0"/>
+              </a:spcAft>
+              <a:buSzPts val="1400"/>
+            </a:pPr>
+            <a:r>
+              <a:rPr lang="en-US" dirty="0">
+                <a:latin typeface="Roboto"/>
+                <a:ea typeface="Roboto"/>
+                <a:cs typeface="Roboto"/>
+                <a:sym typeface="Roboto"/>
+              </a:rPr>
+              <a:t>Project Timeline				               Duration: 2weeks</a:t>
+            </a:r>
+            <a:endParaRPr dirty="0">
+              <a:latin typeface="Roboto"/>
+              <a:ea typeface="Roboto"/>
+              <a:cs typeface="Roboto"/>
+              <a:sym typeface="Roboto"/>
+            </a:endParaRPr>
+          </a:p>
+          <a:p>
+            <a:pPr marL="457200" lvl="0" indent="-317500" algn="l" rtl="0">
+              <a:spcBef>
+                <a:spcPts val="0"/>
+              </a:spcBef>
+              <a:spcAft>
+                <a:spcPts val="0"/>
+              </a:spcAft>
+              <a:buSzPts val="1400"/>
+              <a:buFont typeface="Roboto"/>
+              <a:buChar char="●"/>
+            </a:pPr>
+            <a:r>
+              <a:rPr lang="en" dirty="0">
+                <a:latin typeface="Roboto"/>
+                <a:ea typeface="Roboto"/>
+                <a:cs typeface="Roboto"/>
+                <a:sym typeface="Roboto"/>
+              </a:rPr>
+              <a:t>Research					1-2 Days</a:t>
+            </a:r>
+          </a:p>
+          <a:p>
+            <a:pPr marL="457200" lvl="0" indent="-317500" algn="l" rtl="0">
+              <a:spcBef>
+                <a:spcPts val="0"/>
+              </a:spcBef>
+              <a:spcAft>
+                <a:spcPts val="0"/>
+              </a:spcAft>
+              <a:buSzPts val="1400"/>
+              <a:buFont typeface="Roboto"/>
+              <a:buChar char="●"/>
+            </a:pPr>
+            <a:r>
+              <a:rPr lang="en" dirty="0">
+                <a:latin typeface="Roboto"/>
+                <a:ea typeface="Roboto"/>
+                <a:cs typeface="Roboto"/>
+                <a:sym typeface="Roboto"/>
+              </a:rPr>
+              <a:t>Planning					1 Day</a:t>
+            </a:r>
+          </a:p>
+          <a:p>
+            <a:pPr marL="457200" lvl="0" indent="-317500" algn="l" rtl="0">
+              <a:spcBef>
+                <a:spcPts val="0"/>
+              </a:spcBef>
+              <a:spcAft>
+                <a:spcPts val="0"/>
+              </a:spcAft>
+              <a:buSzPts val="1400"/>
+              <a:buFont typeface="Roboto"/>
+              <a:buChar char="●"/>
+            </a:pPr>
+            <a:r>
+              <a:rPr lang="en" dirty="0">
+                <a:latin typeface="Roboto"/>
+                <a:ea typeface="Roboto"/>
+                <a:cs typeface="Roboto"/>
+                <a:sym typeface="Roboto"/>
+              </a:rPr>
+              <a:t>Designing					2-3 Days</a:t>
+            </a:r>
+          </a:p>
+          <a:p>
+            <a:pPr marL="457200" lvl="0" indent="-317500" algn="l" rtl="0">
+              <a:spcBef>
+                <a:spcPts val="0"/>
+              </a:spcBef>
+              <a:spcAft>
+                <a:spcPts val="0"/>
+              </a:spcAft>
+              <a:buSzPts val="1400"/>
+              <a:buFont typeface="Roboto"/>
+              <a:buChar char="●"/>
+            </a:pPr>
+            <a:r>
+              <a:rPr lang="en" dirty="0">
+                <a:latin typeface="Roboto"/>
+                <a:ea typeface="Roboto"/>
+                <a:cs typeface="Roboto"/>
+                <a:sym typeface="Roboto"/>
+              </a:rPr>
+              <a:t>Coding					5-7 Days</a:t>
+            </a:r>
+          </a:p>
+          <a:p>
+            <a:pPr marL="457200" lvl="0" indent="-317500" algn="l" rtl="0">
+              <a:spcBef>
+                <a:spcPts val="0"/>
+              </a:spcBef>
+              <a:spcAft>
+                <a:spcPts val="0"/>
+              </a:spcAft>
+              <a:buSzPts val="1400"/>
+              <a:buFont typeface="Roboto"/>
+              <a:buChar char="●"/>
+            </a:pPr>
+            <a:r>
+              <a:rPr lang="en" dirty="0">
+                <a:latin typeface="Roboto"/>
+                <a:ea typeface="Roboto"/>
+                <a:cs typeface="Roboto"/>
+                <a:sym typeface="Roboto"/>
+              </a:rPr>
+              <a:t>Presentation					1 Day					</a:t>
+            </a:r>
+          </a:p>
+          <a:p>
+            <a:pPr marL="457200" lvl="0" indent="-317500" algn="l" rtl="0">
+              <a:spcBef>
+                <a:spcPts val="0"/>
+              </a:spcBef>
+              <a:spcAft>
+                <a:spcPts val="0"/>
+              </a:spcAft>
+              <a:buSzPts val="1400"/>
+              <a:buFont typeface="Roboto"/>
+              <a:buChar char="●"/>
+            </a:pPr>
+            <a:endParaRPr dirty="0">
+              <a:latin typeface="Roboto"/>
+              <a:ea typeface="Roboto"/>
+              <a:cs typeface="Roboto"/>
+              <a:sym typeface="Roboto"/>
+            </a:endParaRPr>
+          </a:p>
+          <a:p>
+            <a:pPr marL="457200" lvl="0" indent="-317500" algn="l" rtl="0">
+              <a:spcBef>
+                <a:spcPts val="0"/>
+              </a:spcBef>
+              <a:spcAft>
+                <a:spcPts val="0"/>
+              </a:spcAft>
+              <a:buSzPts val="1400"/>
+              <a:buFont typeface="Roboto"/>
+              <a:buChar char="●"/>
+            </a:pPr>
+            <a:endParaRPr b="1" dirty="0">
+              <a:latin typeface="Roboto"/>
+              <a:ea typeface="Roboto"/>
+              <a:cs typeface="Roboto"/>
+              <a:sym typeface="Roboto"/>
+            </a:endParaRPr>
+          </a:p>
+        </p:txBody>
+      </p:sp>
     </p:spTree>
   </p:cSld>
   <p:clrMapOvr>
@@ -7727,7 +7819,7 @@
         </p:blipFill>
         <p:spPr>
           <a:xfrm>
-            <a:off x="-17405" y="0"/>
+            <a:off x="-5373" y="0"/>
             <a:ext cx="9143990" cy="5143500"/>
           </a:xfrm>
           <a:prstGeom prst="rect">
@@ -7773,98 +7865,6 @@
           </a:ln>
         </p:spPr>
       </p:pic>
-      <p:pic>
-        <p:nvPicPr>
-          <p:cNvPr id="4" name="Google Shape;79;p15">
-            <a:extLst>
-              <a:ext uri="{FF2B5EF4-FFF2-40B4-BE49-F238E27FC236}">
-                <a16:creationId xmlns:a16="http://schemas.microsoft.com/office/drawing/2014/main" id="{E5ECB6F9-A006-5B4D-26A0-279BBE0F78D9}"/>
-              </a:ext>
-            </a:extLst>
-          </p:cNvPr>
-          <p:cNvPicPr preferRelativeResize="0"/>
-          <p:nvPr/>
-        </p:nvPicPr>
-        <p:blipFill>
-          <a:blip r:embed="rId5">
-            <a:alphaModFix/>
-          </a:blip>
-          <a:stretch>
-            <a:fillRect/>
-          </a:stretch>
-        </p:blipFill>
-        <p:spPr>
-          <a:xfrm>
-            <a:off x="981500" y="4790750"/>
-            <a:ext cx="736900" cy="139250"/>
-          </a:xfrm>
-          <a:prstGeom prst="rect">
-            <a:avLst/>
-          </a:prstGeom>
-          <a:noFill/>
-          <a:ln>
-            <a:noFill/>
-          </a:ln>
-        </p:spPr>
-      </p:pic>
-      <p:sp>
-        <p:nvSpPr>
-          <p:cNvPr id="5" name="Google Shape;80;p15">
-            <a:extLst>
-              <a:ext uri="{FF2B5EF4-FFF2-40B4-BE49-F238E27FC236}">
-                <a16:creationId xmlns:a16="http://schemas.microsoft.com/office/drawing/2014/main" id="{CD1F232D-0886-3C06-5AD9-1EE6505FE133}"/>
-              </a:ext>
-            </a:extLst>
-          </p:cNvPr>
-          <p:cNvSpPr txBox="1"/>
-          <p:nvPr/>
-        </p:nvSpPr>
-        <p:spPr>
-          <a:xfrm>
-            <a:off x="278100" y="4714125"/>
-            <a:ext cx="893100" cy="292500"/>
-          </a:xfrm>
-          <a:prstGeom prst="rect">
-            <a:avLst/>
-          </a:prstGeom>
-          <a:noFill/>
-          <a:ln>
-            <a:noFill/>
-          </a:ln>
-        </p:spPr>
-        <p:txBody>
-          <a:bodyPr spcFirstLastPara="1" wrap="square" lIns="91425" tIns="91425" rIns="91425" bIns="91425" anchor="t" anchorCtr="0">
-            <a:spAutoFit/>
-          </a:bodyPr>
-          <a:lstStyle/>
-          <a:p>
-            <a:pPr marL="0" lvl="0" indent="0" algn="l" rtl="0">
-              <a:spcBef>
-                <a:spcPts val="0"/>
-              </a:spcBef>
-              <a:spcAft>
-                <a:spcPts val="0"/>
-              </a:spcAft>
-              <a:buNone/>
-            </a:pPr>
-            <a:r>
-              <a:rPr lang="en" sz="700">
-                <a:latin typeface="Montserrat"/>
-                <a:ea typeface="Montserrat"/>
-                <a:cs typeface="Montserrat"/>
-                <a:sym typeface="Montserrat"/>
-              </a:rPr>
-              <a:t>Powered by</a:t>
-            </a:r>
-            <a:endParaRPr sz="700">
-              <a:latin typeface="Montserrat"/>
-              <a:ea typeface="Montserrat"/>
-              <a:cs typeface="Montserrat"/>
-              <a:sym typeface="Montserrat"/>
-            </a:endParaRPr>
-          </a:p>
-        </p:txBody>
-      </p:sp>
       <p:sp>
         <p:nvSpPr>
           <p:cNvPr id="6" name="Google Shape;81;p15">
@@ -7879,7 +7879,7 @@
         </p:nvSpPr>
         <p:spPr>
           <a:xfrm>
-            <a:off x="528450" y="1218425"/>
+            <a:off x="485700" y="767270"/>
             <a:ext cx="4086300" cy="400079"/>
           </a:xfrm>
           <a:prstGeom prst="rect">
@@ -7996,7 +7996,7 @@
           <p:nvPr/>
         </p:nvPicPr>
         <p:blipFill>
-          <a:blip r:embed="rId6">
+          <a:blip r:embed="rId5">
             <a:alphaModFix/>
           </a:blip>
           <a:stretch>
@@ -8031,7 +8031,7 @@
         </p:nvSpPr>
         <p:spPr>
           <a:xfrm>
-            <a:off x="3741823" y="1218425"/>
+            <a:off x="3807995" y="390966"/>
             <a:ext cx="1528010" cy="610375"/>
           </a:xfrm>
           <a:prstGeom prst="rect">
@@ -8078,7 +8078,7 @@
         </p:nvSpPr>
         <p:spPr>
           <a:xfrm>
-            <a:off x="2499898" y="2311481"/>
+            <a:off x="885754" y="1484022"/>
             <a:ext cx="1223084" cy="625642"/>
           </a:xfrm>
           <a:prstGeom prst="rect">
@@ -8125,7 +8125,7 @@
         </p:nvSpPr>
         <p:spPr>
           <a:xfrm>
-            <a:off x="3900298" y="2311481"/>
+            <a:off x="2414401" y="1484022"/>
             <a:ext cx="1223084" cy="625642"/>
           </a:xfrm>
           <a:prstGeom prst="rect">
@@ -8153,7 +8153,7 @@
             <a:pPr algn="ctr"/>
             <a:r>
               <a:rPr lang="en-US" dirty="0"/>
-              <a:t>Products</a:t>
+              <a:t>Event</a:t>
             </a:r>
           </a:p>
         </p:txBody>
@@ -8172,7 +8172,7 @@
         </p:nvSpPr>
         <p:spPr>
           <a:xfrm>
-            <a:off x="5269340" y="2311481"/>
+            <a:off x="7000342" y="1484022"/>
             <a:ext cx="1223084" cy="625642"/>
           </a:xfrm>
           <a:prstGeom prst="rect">
@@ -8207,10 +8207,10 @@
       </p:sp>
       <p:sp>
         <p:nvSpPr>
-          <p:cNvPr id="14" name="Rectangle 13">
+          <p:cNvPr id="12" name="Rectangle 11">
             <a:extLst>
               <a:ext uri="{FF2B5EF4-FFF2-40B4-BE49-F238E27FC236}">
-                <a16:creationId xmlns:a16="http://schemas.microsoft.com/office/drawing/2014/main" id="{4DC3EE66-EF38-2714-ACCE-63ADD535BA69}"/>
+                <a16:creationId xmlns:a16="http://schemas.microsoft.com/office/drawing/2014/main" id="{97A8E337-20CF-EFE2-54B7-75461DE13FD1}"/>
               </a:ext>
             </a:extLst>
           </p:cNvPr>
@@ -8219,7 +8219,7 @@
         </p:nvSpPr>
         <p:spPr>
           <a:xfrm>
-            <a:off x="2499898" y="3514639"/>
+            <a:off x="3967112" y="1455790"/>
             <a:ext cx="1223084" cy="625642"/>
           </a:xfrm>
           <a:prstGeom prst="rect">
@@ -8247,17 +8247,17 @@
             <a:pPr algn="ctr"/>
             <a:r>
               <a:rPr lang="en-US" dirty="0"/>
-              <a:t>Characters</a:t>
+              <a:t>Character</a:t>
             </a:r>
           </a:p>
         </p:txBody>
       </p:sp>
       <p:sp>
         <p:nvSpPr>
-          <p:cNvPr id="15" name="Rectangle 14">
+          <p:cNvPr id="25" name="Rectangle 24">
             <a:extLst>
               <a:ext uri="{FF2B5EF4-FFF2-40B4-BE49-F238E27FC236}">
-                <a16:creationId xmlns:a16="http://schemas.microsoft.com/office/drawing/2014/main" id="{EC51322C-8BB5-5CCD-56DF-0931995A7163}"/>
+                <a16:creationId xmlns:a16="http://schemas.microsoft.com/office/drawing/2014/main" id="{6D22DB0B-47FA-429F-6D51-5518E883FEA7}"/>
               </a:ext>
             </a:extLst>
           </p:cNvPr>
@@ -8266,7 +8266,7 @@
         </p:nvSpPr>
         <p:spPr>
           <a:xfrm>
-            <a:off x="3900298" y="3514639"/>
+            <a:off x="5471695" y="1484022"/>
             <a:ext cx="1223084" cy="625642"/>
           </a:xfrm>
           <a:prstGeom prst="rect">
@@ -8294,17 +8294,17 @@
             <a:pPr algn="ctr"/>
             <a:r>
               <a:rPr lang="en-US" dirty="0"/>
-              <a:t>Checkout</a:t>
+              <a:t>Product</a:t>
             </a:r>
           </a:p>
         </p:txBody>
       </p:sp>
       <p:sp>
         <p:nvSpPr>
-          <p:cNvPr id="16" name="Rectangle 15">
+          <p:cNvPr id="29" name="Rectangle 28">
             <a:extLst>
               <a:ext uri="{FF2B5EF4-FFF2-40B4-BE49-F238E27FC236}">
-                <a16:creationId xmlns:a16="http://schemas.microsoft.com/office/drawing/2014/main" id="{883A3773-5D30-F487-D785-D7B4C053F206}"/>
+                <a16:creationId xmlns:a16="http://schemas.microsoft.com/office/drawing/2014/main" id="{2940974B-B82A-0AC1-077E-9433C7BDABF8}"/>
               </a:ext>
             </a:extLst>
           </p:cNvPr>
@@ -8313,7 +8313,383 @@
         </p:nvSpPr>
         <p:spPr>
           <a:xfrm>
-            <a:off x="5269340" y="3514639"/>
+            <a:off x="885754" y="2388509"/>
+            <a:ext cx="1223084" cy="625642"/>
+          </a:xfrm>
+          <a:prstGeom prst="rect">
+            <a:avLst/>
+          </a:prstGeom>
+        </p:spPr>
+        <p:style>
+          <a:lnRef idx="2">
+            <a:schemeClr val="dk1"/>
+          </a:lnRef>
+          <a:fillRef idx="1">
+            <a:schemeClr val="lt1"/>
+          </a:fillRef>
+          <a:effectRef idx="0">
+            <a:schemeClr val="dk1"/>
+          </a:effectRef>
+          <a:fontRef idx="minor">
+            <a:schemeClr val="dk1"/>
+          </a:fontRef>
+        </p:style>
+        <p:txBody>
+          <a:bodyPr rtlCol="0" anchor="ctr"/>
+          <a:lstStyle/>
+          <a:p>
+            <a:pPr algn="ctr"/>
+            <a:r>
+              <a:rPr lang="en-US" dirty="0"/>
+              <a:t>One piece article</a:t>
+            </a:r>
+          </a:p>
+        </p:txBody>
+      </p:sp>
+      <p:sp>
+        <p:nvSpPr>
+          <p:cNvPr id="30" name="Rectangle 29">
+            <a:extLst>
+              <a:ext uri="{FF2B5EF4-FFF2-40B4-BE49-F238E27FC236}">
+                <a16:creationId xmlns:a16="http://schemas.microsoft.com/office/drawing/2014/main" id="{D6879555-BF28-489E-3E5C-BB1CC1D889DC}"/>
+              </a:ext>
+            </a:extLst>
+          </p:cNvPr>
+          <p:cNvSpPr/>
+          <p:nvPr/>
+        </p:nvSpPr>
+        <p:spPr>
+          <a:xfrm>
+            <a:off x="885513" y="3292996"/>
+            <a:ext cx="1223084" cy="625642"/>
+          </a:xfrm>
+          <a:prstGeom prst="rect">
+            <a:avLst/>
+          </a:prstGeom>
+        </p:spPr>
+        <p:style>
+          <a:lnRef idx="2">
+            <a:schemeClr val="dk1"/>
+          </a:lnRef>
+          <a:fillRef idx="1">
+            <a:schemeClr val="lt1"/>
+          </a:fillRef>
+          <a:effectRef idx="0">
+            <a:schemeClr val="dk1"/>
+          </a:effectRef>
+          <a:fontRef idx="minor">
+            <a:schemeClr val="dk1"/>
+          </a:fontRef>
+        </p:style>
+        <p:txBody>
+          <a:bodyPr rtlCol="0" anchor="ctr"/>
+          <a:lstStyle/>
+          <a:p>
+            <a:pPr algn="ctr"/>
+            <a:r>
+              <a:rPr lang="en-US" dirty="0"/>
+              <a:t>Event</a:t>
+            </a:r>
+          </a:p>
+        </p:txBody>
+      </p:sp>
+      <p:sp>
+        <p:nvSpPr>
+          <p:cNvPr id="31" name="Rectangle 30">
+            <a:extLst>
+              <a:ext uri="{FF2B5EF4-FFF2-40B4-BE49-F238E27FC236}">
+                <a16:creationId xmlns:a16="http://schemas.microsoft.com/office/drawing/2014/main" id="{613995F0-864E-283D-AEBE-958AB53B9D0D}"/>
+              </a:ext>
+            </a:extLst>
+          </p:cNvPr>
+          <p:cNvSpPr/>
+          <p:nvPr/>
+        </p:nvSpPr>
+        <p:spPr>
+          <a:xfrm>
+            <a:off x="885272" y="4126796"/>
+            <a:ext cx="1223084" cy="625642"/>
+          </a:xfrm>
+          <a:prstGeom prst="rect">
+            <a:avLst/>
+          </a:prstGeom>
+        </p:spPr>
+        <p:style>
+          <a:lnRef idx="2">
+            <a:schemeClr val="dk1"/>
+          </a:lnRef>
+          <a:fillRef idx="1">
+            <a:schemeClr val="lt1"/>
+          </a:fillRef>
+          <a:effectRef idx="0">
+            <a:schemeClr val="dk1"/>
+          </a:effectRef>
+          <a:fontRef idx="minor">
+            <a:schemeClr val="dk1"/>
+          </a:fontRef>
+        </p:style>
+        <p:txBody>
+          <a:bodyPr rtlCol="0" anchor="ctr"/>
+          <a:lstStyle/>
+          <a:p>
+            <a:pPr algn="ctr"/>
+            <a:r>
+              <a:rPr lang="en-US" dirty="0"/>
+              <a:t>Sign Up</a:t>
+            </a:r>
+          </a:p>
+        </p:txBody>
+      </p:sp>
+      <p:sp>
+        <p:nvSpPr>
+          <p:cNvPr id="32" name="Rectangle 31">
+            <a:extLst>
+              <a:ext uri="{FF2B5EF4-FFF2-40B4-BE49-F238E27FC236}">
+                <a16:creationId xmlns:a16="http://schemas.microsoft.com/office/drawing/2014/main" id="{6325432E-F18A-72FD-1270-DAF70F47E9CA}"/>
+              </a:ext>
+            </a:extLst>
+          </p:cNvPr>
+          <p:cNvSpPr/>
+          <p:nvPr/>
+        </p:nvSpPr>
+        <p:spPr>
+          <a:xfrm>
+            <a:off x="2414401" y="2391089"/>
+            <a:ext cx="1223084" cy="625642"/>
+          </a:xfrm>
+          <a:prstGeom prst="rect">
+            <a:avLst/>
+          </a:prstGeom>
+        </p:spPr>
+        <p:style>
+          <a:lnRef idx="2">
+            <a:schemeClr val="dk1"/>
+          </a:lnRef>
+          <a:fillRef idx="1">
+            <a:schemeClr val="lt1"/>
+          </a:fillRef>
+          <a:effectRef idx="0">
+            <a:schemeClr val="dk1"/>
+          </a:effectRef>
+          <a:fontRef idx="minor">
+            <a:schemeClr val="dk1"/>
+          </a:fontRef>
+        </p:style>
+        <p:txBody>
+          <a:bodyPr rtlCol="0" anchor="ctr"/>
+          <a:lstStyle/>
+          <a:p>
+            <a:pPr algn="ctr"/>
+            <a:r>
+              <a:rPr lang="en-US" dirty="0"/>
+              <a:t>One piece Episode</a:t>
+            </a:r>
+          </a:p>
+        </p:txBody>
+      </p:sp>
+      <p:sp>
+        <p:nvSpPr>
+          <p:cNvPr id="33" name="Rectangle 32">
+            <a:extLst>
+              <a:ext uri="{FF2B5EF4-FFF2-40B4-BE49-F238E27FC236}">
+                <a16:creationId xmlns:a16="http://schemas.microsoft.com/office/drawing/2014/main" id="{821602E7-C3B4-FF4E-9D10-1EA7F039AD41}"/>
+              </a:ext>
+            </a:extLst>
+          </p:cNvPr>
+          <p:cNvSpPr/>
+          <p:nvPr/>
+        </p:nvSpPr>
+        <p:spPr>
+          <a:xfrm>
+            <a:off x="2414401" y="3289438"/>
+            <a:ext cx="1223084" cy="625642"/>
+          </a:xfrm>
+          <a:prstGeom prst="rect">
+            <a:avLst/>
+          </a:prstGeom>
+        </p:spPr>
+        <p:style>
+          <a:lnRef idx="2">
+            <a:schemeClr val="dk1"/>
+          </a:lnRef>
+          <a:fillRef idx="1">
+            <a:schemeClr val="lt1"/>
+          </a:fillRef>
+          <a:effectRef idx="0">
+            <a:schemeClr val="dk1"/>
+          </a:effectRef>
+          <a:fontRef idx="minor">
+            <a:schemeClr val="dk1"/>
+          </a:fontRef>
+        </p:style>
+        <p:txBody>
+          <a:bodyPr rtlCol="0" anchor="ctr"/>
+          <a:lstStyle/>
+          <a:p>
+            <a:pPr algn="ctr"/>
+            <a:r>
+              <a:rPr lang="en-US" dirty="0"/>
+              <a:t>One piece Movies</a:t>
+            </a:r>
+          </a:p>
+        </p:txBody>
+      </p:sp>
+      <p:sp>
+        <p:nvSpPr>
+          <p:cNvPr id="34" name="Rectangle 33">
+            <a:extLst>
+              <a:ext uri="{FF2B5EF4-FFF2-40B4-BE49-F238E27FC236}">
+                <a16:creationId xmlns:a16="http://schemas.microsoft.com/office/drawing/2014/main" id="{E0CD39F9-3352-5165-37C6-061F566F9838}"/>
+              </a:ext>
+            </a:extLst>
+          </p:cNvPr>
+          <p:cNvSpPr/>
+          <p:nvPr/>
+        </p:nvSpPr>
+        <p:spPr>
+          <a:xfrm>
+            <a:off x="2414401" y="4126796"/>
+            <a:ext cx="1223084" cy="625642"/>
+          </a:xfrm>
+          <a:prstGeom prst="rect">
+            <a:avLst/>
+          </a:prstGeom>
+        </p:spPr>
+        <p:style>
+          <a:lnRef idx="2">
+            <a:schemeClr val="dk1"/>
+          </a:lnRef>
+          <a:fillRef idx="1">
+            <a:schemeClr val="lt1"/>
+          </a:fillRef>
+          <a:effectRef idx="0">
+            <a:schemeClr val="dk1"/>
+          </a:effectRef>
+          <a:fontRef idx="minor">
+            <a:schemeClr val="dk1"/>
+          </a:fontRef>
+        </p:style>
+        <p:txBody>
+          <a:bodyPr rtlCol="0" anchor="ctr"/>
+          <a:lstStyle/>
+          <a:p>
+            <a:pPr algn="ctr"/>
+            <a:r>
+              <a:rPr lang="en-US" dirty="0"/>
+              <a:t>One piece Anniversary</a:t>
+            </a:r>
+          </a:p>
+        </p:txBody>
+      </p:sp>
+      <p:sp>
+        <p:nvSpPr>
+          <p:cNvPr id="35" name="Rectangle 34">
+            <a:extLst>
+              <a:ext uri="{FF2B5EF4-FFF2-40B4-BE49-F238E27FC236}">
+                <a16:creationId xmlns:a16="http://schemas.microsoft.com/office/drawing/2014/main" id="{EC032BF5-53C0-DEFE-B046-17FC05C22AC7}"/>
+              </a:ext>
+            </a:extLst>
+          </p:cNvPr>
+          <p:cNvSpPr/>
+          <p:nvPr/>
+        </p:nvSpPr>
+        <p:spPr>
+          <a:xfrm>
+            <a:off x="3960458" y="2363774"/>
+            <a:ext cx="1223084" cy="625642"/>
+          </a:xfrm>
+          <a:prstGeom prst="rect">
+            <a:avLst/>
+          </a:prstGeom>
+        </p:spPr>
+        <p:style>
+          <a:lnRef idx="2">
+            <a:schemeClr val="dk1"/>
+          </a:lnRef>
+          <a:fillRef idx="1">
+            <a:schemeClr val="lt1"/>
+          </a:fillRef>
+          <a:effectRef idx="0">
+            <a:schemeClr val="dk1"/>
+          </a:effectRef>
+          <a:fontRef idx="minor">
+            <a:schemeClr val="dk1"/>
+          </a:fontRef>
+        </p:style>
+        <p:txBody>
+          <a:bodyPr rtlCol="0" anchor="ctr"/>
+          <a:lstStyle/>
+          <a:p>
+            <a:pPr algn="ctr"/>
+            <a:r>
+              <a:rPr lang="en-US" dirty="0"/>
+              <a:t>One Piece Characters</a:t>
+            </a:r>
+          </a:p>
+        </p:txBody>
+      </p:sp>
+      <p:sp>
+        <p:nvSpPr>
+          <p:cNvPr id="36" name="Rectangle 35">
+            <a:extLst>
+              <a:ext uri="{FF2B5EF4-FFF2-40B4-BE49-F238E27FC236}">
+                <a16:creationId xmlns:a16="http://schemas.microsoft.com/office/drawing/2014/main" id="{4CB76A69-A2C7-57DC-23B3-E1BC0BA2C512}"/>
+              </a:ext>
+            </a:extLst>
+          </p:cNvPr>
+          <p:cNvSpPr/>
+          <p:nvPr/>
+        </p:nvSpPr>
+        <p:spPr>
+          <a:xfrm>
+            <a:off x="5477073" y="2363773"/>
+            <a:ext cx="1223084" cy="1029131"/>
+          </a:xfrm>
+          <a:prstGeom prst="rect">
+            <a:avLst/>
+          </a:prstGeom>
+        </p:spPr>
+        <p:style>
+          <a:lnRef idx="2">
+            <a:schemeClr val="dk1"/>
+          </a:lnRef>
+          <a:fillRef idx="1">
+            <a:schemeClr val="lt1"/>
+          </a:fillRef>
+          <a:effectRef idx="0">
+            <a:schemeClr val="dk1"/>
+          </a:effectRef>
+          <a:fontRef idx="minor">
+            <a:schemeClr val="dk1"/>
+          </a:fontRef>
+        </p:style>
+        <p:txBody>
+          <a:bodyPr rtlCol="0" anchor="ctr"/>
+          <a:lstStyle/>
+          <a:p>
+            <a:pPr algn="ctr"/>
+            <a:r>
+              <a:rPr lang="en-US" dirty="0"/>
+              <a:t>One piece miniatures and Collectibles</a:t>
+            </a:r>
+          </a:p>
+        </p:txBody>
+      </p:sp>
+      <p:sp>
+        <p:nvSpPr>
+          <p:cNvPr id="37" name="Rectangle 36">
+            <a:extLst>
+              <a:ext uri="{FF2B5EF4-FFF2-40B4-BE49-F238E27FC236}">
+                <a16:creationId xmlns:a16="http://schemas.microsoft.com/office/drawing/2014/main" id="{23A4C9A4-1739-82F4-153B-181A699EC40D}"/>
+              </a:ext>
+            </a:extLst>
+          </p:cNvPr>
+          <p:cNvSpPr/>
+          <p:nvPr/>
+        </p:nvSpPr>
+        <p:spPr>
+          <a:xfrm>
+            <a:off x="7000342" y="2363774"/>
             <a:ext cx="1223084" cy="625642"/>
           </a:xfrm>
           <a:prstGeom prst="rect">
@@ -8348,23 +8724,23 @@
       </p:sp>
       <p:cxnSp>
         <p:nvCxnSpPr>
-          <p:cNvPr id="17" name="Straight Arrow Connector 16">
+          <p:cNvPr id="39" name="Straight Arrow Connector 38">
             <a:extLst>
               <a:ext uri="{FF2B5EF4-FFF2-40B4-BE49-F238E27FC236}">
-                <a16:creationId xmlns:a16="http://schemas.microsoft.com/office/drawing/2014/main" id="{B1923108-AB25-1641-B0BC-C5EA4E03FB64}"/>
+                <a16:creationId xmlns:a16="http://schemas.microsoft.com/office/drawing/2014/main" id="{EC62D083-847D-B507-509D-3650291EEF6B}"/>
               </a:ext>
             </a:extLst>
           </p:cNvPr>
           <p:cNvCxnSpPr>
-            <a:stCxn id="10" idx="2"/>
-            <a:endCxn id="14" idx="0"/>
+            <a:stCxn id="6" idx="3"/>
+            <a:endCxn id="12" idx="0"/>
           </p:cNvCxnSpPr>
           <p:nvPr/>
         </p:nvCxnSpPr>
         <p:spPr>
           <a:xfrm>
-            <a:off x="3111440" y="2937123"/>
-            <a:ext cx="0" cy="577516"/>
+            <a:off x="4572000" y="967310"/>
+            <a:ext cx="6654" cy="488480"/>
           </a:xfrm>
           <a:prstGeom prst="straightConnector1">
             <a:avLst/>
@@ -8390,23 +8766,22 @@
       </p:cxnSp>
       <p:cxnSp>
         <p:nvCxnSpPr>
-          <p:cNvPr id="18" name="Straight Arrow Connector 17">
+          <p:cNvPr id="43" name="Straight Arrow Connector 42">
             <a:extLst>
               <a:ext uri="{FF2B5EF4-FFF2-40B4-BE49-F238E27FC236}">
-                <a16:creationId xmlns:a16="http://schemas.microsoft.com/office/drawing/2014/main" id="{D5643FBC-D1CB-992A-EA2F-97E7B5346C62}"/>
+                <a16:creationId xmlns:a16="http://schemas.microsoft.com/office/drawing/2014/main" id="{AC563C3F-1BF9-746C-972B-B92A9AE9C7BE}"/>
               </a:ext>
             </a:extLst>
           </p:cNvPr>
           <p:cNvCxnSpPr>
-            <a:stCxn id="11" idx="2"/>
-            <a:endCxn id="15" idx="0"/>
+            <a:endCxn id="35" idx="0"/>
           </p:cNvCxnSpPr>
           <p:nvPr/>
         </p:nvCxnSpPr>
         <p:spPr>
           <a:xfrm>
-            <a:off x="4511840" y="2937123"/>
-            <a:ext cx="0" cy="577516"/>
+            <a:off x="4566622" y="2081432"/>
+            <a:ext cx="0" cy="282341"/>
           </a:xfrm>
           <a:prstGeom prst="straightConnector1">
             <a:avLst/>
@@ -8432,30 +8807,24 @@
       </p:cxnSp>
       <p:cxnSp>
         <p:nvCxnSpPr>
-          <p:cNvPr id="19" name="Straight Arrow Connector 18">
+          <p:cNvPr id="45" name="Straight Connector 44">
             <a:extLst>
               <a:ext uri="{FF2B5EF4-FFF2-40B4-BE49-F238E27FC236}">
-                <a16:creationId xmlns:a16="http://schemas.microsoft.com/office/drawing/2014/main" id="{DC0B0C0D-5888-6D7B-D47E-DE2E2CAEF95D}"/>
+                <a16:creationId xmlns:a16="http://schemas.microsoft.com/office/drawing/2014/main" id="{4BEB277C-D4B8-F1A5-FC3E-E242EE922A4E}"/>
               </a:ext>
             </a:extLst>
           </p:cNvPr>
-          <p:cNvCxnSpPr>
-            <a:stCxn id="13" idx="2"/>
-            <a:endCxn id="16" idx="0"/>
-          </p:cNvCxnSpPr>
+          <p:cNvCxnSpPr/>
           <p:nvPr/>
         </p:nvCxnSpPr>
         <p:spPr>
           <a:xfrm>
-            <a:off x="5880882" y="2937123"/>
-            <a:ext cx="0" cy="577516"/>
-          </a:xfrm>
-          <a:prstGeom prst="straightConnector1">
-            <a:avLst/>
-          </a:prstGeom>
-          <a:ln>
-            <a:tailEnd type="triangle"/>
-          </a:ln>
+            <a:off x="1430602" y="1224862"/>
+            <a:ext cx="6185387" cy="0"/>
+          </a:xfrm>
+          <a:prstGeom prst="line">
+            <a:avLst/>
+          </a:prstGeom>
         </p:spPr>
         <p:style>
           <a:lnRef idx="1">
@@ -8474,26 +8843,27 @@
       </p:cxnSp>
       <p:cxnSp>
         <p:nvCxnSpPr>
-          <p:cNvPr id="20" name="Straight Connector 19">
+          <p:cNvPr id="49" name="Straight Arrow Connector 48">
             <a:extLst>
               <a:ext uri="{FF2B5EF4-FFF2-40B4-BE49-F238E27FC236}">
-                <a16:creationId xmlns:a16="http://schemas.microsoft.com/office/drawing/2014/main" id="{F94B5463-DEB1-C435-E465-56FAF59B834A}"/>
+                <a16:creationId xmlns:a16="http://schemas.microsoft.com/office/drawing/2014/main" id="{78596DEC-6783-85D3-36DD-257DC1A0FF5E}"/>
               </a:ext>
             </a:extLst>
           </p:cNvPr>
-          <p:cNvCxnSpPr>
-            <a:stCxn id="9" idx="2"/>
-          </p:cNvCxnSpPr>
+          <p:cNvCxnSpPr/>
           <p:nvPr/>
         </p:nvCxnSpPr>
         <p:spPr>
           <a:xfrm>
-            <a:off x="4505828" y="1828800"/>
-            <a:ext cx="0" cy="204537"/>
-          </a:xfrm>
-          <a:prstGeom prst="line">
-            <a:avLst/>
-          </a:prstGeom>
+            <a:off x="1430602" y="1224862"/>
+            <a:ext cx="0" cy="259160"/>
+          </a:xfrm>
+          <a:prstGeom prst="straightConnector1">
+            <a:avLst/>
+          </a:prstGeom>
+          <a:ln>
+            <a:tailEnd type="triangle"/>
+          </a:ln>
         </p:spPr>
         <p:style>
           <a:lnRef idx="1">
@@ -8512,10 +8882,10 @@
       </p:cxnSp>
       <p:cxnSp>
         <p:nvCxnSpPr>
-          <p:cNvPr id="21" name="Straight Connector 20">
+          <p:cNvPr id="51" name="Straight Arrow Connector 50">
             <a:extLst>
               <a:ext uri="{FF2B5EF4-FFF2-40B4-BE49-F238E27FC236}">
-                <a16:creationId xmlns:a16="http://schemas.microsoft.com/office/drawing/2014/main" id="{18BEC5B3-0501-4DA4-458B-08D2764094B3}"/>
+                <a16:creationId xmlns:a16="http://schemas.microsoft.com/office/drawing/2014/main" id="{F6FAD860-AE54-1B23-C7FA-510C0FD14897}"/>
               </a:ext>
             </a:extLst>
           </p:cNvPr>
@@ -8524,12 +8894,15 @@
         </p:nvCxnSpPr>
         <p:spPr>
           <a:xfrm>
-            <a:off x="3111440" y="2033337"/>
-            <a:ext cx="2769442" cy="0"/>
-          </a:xfrm>
-          <a:prstGeom prst="line">
-            <a:avLst/>
-          </a:prstGeom>
+            <a:off x="2983832" y="1224862"/>
+            <a:ext cx="0" cy="230928"/>
+          </a:xfrm>
+          <a:prstGeom prst="straightConnector1">
+            <a:avLst/>
+          </a:prstGeom>
+          <a:ln>
+            <a:tailEnd type="triangle"/>
+          </a:ln>
         </p:spPr>
         <p:style>
           <a:lnRef idx="1">
@@ -8548,22 +8921,20 @@
       </p:cxnSp>
       <p:cxnSp>
         <p:nvCxnSpPr>
-          <p:cNvPr id="22" name="Straight Arrow Connector 21">
+          <p:cNvPr id="53" name="Straight Arrow Connector 52">
             <a:extLst>
               <a:ext uri="{FF2B5EF4-FFF2-40B4-BE49-F238E27FC236}">
-                <a16:creationId xmlns:a16="http://schemas.microsoft.com/office/drawing/2014/main" id="{0663493E-FD8F-39AB-72F4-F5AB4E334927}"/>
+                <a16:creationId xmlns:a16="http://schemas.microsoft.com/office/drawing/2014/main" id="{C275A0CA-C899-C048-7BD2-D23A578E3E38}"/>
               </a:ext>
             </a:extLst>
           </p:cNvPr>
-          <p:cNvCxnSpPr>
-            <a:endCxn id="10" idx="0"/>
-          </p:cNvCxnSpPr>
+          <p:cNvCxnSpPr/>
           <p:nvPr/>
         </p:nvCxnSpPr>
         <p:spPr>
           <a:xfrm>
-            <a:off x="3111440" y="2033337"/>
-            <a:ext cx="0" cy="278144"/>
+            <a:off x="6051884" y="1224862"/>
+            <a:ext cx="0" cy="230928"/>
           </a:xfrm>
           <a:prstGeom prst="straightConnector1">
             <a:avLst/>
@@ -8589,23 +8960,22 @@
       </p:cxnSp>
       <p:cxnSp>
         <p:nvCxnSpPr>
-          <p:cNvPr id="23" name="Straight Arrow Connector 22">
+          <p:cNvPr id="55" name="Straight Arrow Connector 54">
             <a:extLst>
               <a:ext uri="{FF2B5EF4-FFF2-40B4-BE49-F238E27FC236}">
-                <a16:creationId xmlns:a16="http://schemas.microsoft.com/office/drawing/2014/main" id="{0D794603-AD54-97E5-E10D-BC21322553F8}"/>
+                <a16:creationId xmlns:a16="http://schemas.microsoft.com/office/drawing/2014/main" id="{0F6F1772-E36F-1000-B67D-B3E332342207}"/>
               </a:ext>
             </a:extLst>
           </p:cNvPr>
           <p:cNvCxnSpPr>
-            <a:cxnSpLocks/>
-            <a:endCxn id="11" idx="0"/>
+            <a:endCxn id="13" idx="0"/>
           </p:cNvCxnSpPr>
           <p:nvPr/>
         </p:nvCxnSpPr>
         <p:spPr>
-          <a:xfrm>
-            <a:off x="4511840" y="2033337"/>
-            <a:ext cx="0" cy="278144"/>
+          <a:xfrm flipH="1">
+            <a:off x="7611884" y="1224862"/>
+            <a:ext cx="4105" cy="259160"/>
           </a:xfrm>
           <a:prstGeom prst="straightConnector1">
             <a:avLst/>
@@ -8631,22 +9001,312 @@
       </p:cxnSp>
       <p:cxnSp>
         <p:nvCxnSpPr>
-          <p:cNvPr id="24" name="Straight Arrow Connector 23">
+          <p:cNvPr id="57" name="Straight Arrow Connector 56">
             <a:extLst>
               <a:ext uri="{FF2B5EF4-FFF2-40B4-BE49-F238E27FC236}">
-                <a16:creationId xmlns:a16="http://schemas.microsoft.com/office/drawing/2014/main" id="{8C4DECEB-E592-EADD-9011-CE119CABDD91}"/>
+                <a16:creationId xmlns:a16="http://schemas.microsoft.com/office/drawing/2014/main" id="{A4DFA7A6-C483-FE33-FA2B-5434AD12FED7}"/>
               </a:ext>
             </a:extLst>
           </p:cNvPr>
           <p:cNvCxnSpPr>
-            <a:endCxn id="13" idx="0"/>
+            <a:stCxn id="10" idx="2"/>
+            <a:endCxn id="29" idx="0"/>
           </p:cNvCxnSpPr>
           <p:nvPr/>
         </p:nvCxnSpPr>
         <p:spPr>
           <a:xfrm>
-            <a:off x="5880882" y="2033337"/>
-            <a:ext cx="0" cy="278144"/>
+            <a:off x="1497296" y="2109664"/>
+            <a:ext cx="0" cy="278845"/>
+          </a:xfrm>
+          <a:prstGeom prst="straightConnector1">
+            <a:avLst/>
+          </a:prstGeom>
+          <a:ln>
+            <a:tailEnd type="triangle"/>
+          </a:ln>
+        </p:spPr>
+        <p:style>
+          <a:lnRef idx="1">
+            <a:schemeClr val="dk1"/>
+          </a:lnRef>
+          <a:fillRef idx="0">
+            <a:schemeClr val="dk1"/>
+          </a:fillRef>
+          <a:effectRef idx="0">
+            <a:schemeClr val="dk1"/>
+          </a:effectRef>
+          <a:fontRef idx="minor">
+            <a:schemeClr val="tx1"/>
+          </a:fontRef>
+        </p:style>
+      </p:cxnSp>
+      <p:cxnSp>
+        <p:nvCxnSpPr>
+          <p:cNvPr id="59" name="Straight Arrow Connector 58">
+            <a:extLst>
+              <a:ext uri="{FF2B5EF4-FFF2-40B4-BE49-F238E27FC236}">
+                <a16:creationId xmlns:a16="http://schemas.microsoft.com/office/drawing/2014/main" id="{973640CC-3334-7C8A-C37A-83BC16693AB5}"/>
+              </a:ext>
+            </a:extLst>
+          </p:cNvPr>
+          <p:cNvCxnSpPr>
+            <a:stCxn id="29" idx="2"/>
+          </p:cNvCxnSpPr>
+          <p:nvPr/>
+        </p:nvCxnSpPr>
+        <p:spPr>
+          <a:xfrm>
+            <a:off x="1497296" y="3014151"/>
+            <a:ext cx="18683" cy="275287"/>
+          </a:xfrm>
+          <a:prstGeom prst="straightConnector1">
+            <a:avLst/>
+          </a:prstGeom>
+          <a:ln>
+            <a:tailEnd type="triangle"/>
+          </a:ln>
+        </p:spPr>
+        <p:style>
+          <a:lnRef idx="1">
+            <a:schemeClr val="dk1"/>
+          </a:lnRef>
+          <a:fillRef idx="0">
+            <a:schemeClr val="dk1"/>
+          </a:fillRef>
+          <a:effectRef idx="0">
+            <a:schemeClr val="dk1"/>
+          </a:effectRef>
+          <a:fontRef idx="minor">
+            <a:schemeClr val="tx1"/>
+          </a:fontRef>
+        </p:style>
+      </p:cxnSp>
+      <p:cxnSp>
+        <p:nvCxnSpPr>
+          <p:cNvPr id="61" name="Straight Arrow Connector 60">
+            <a:extLst>
+              <a:ext uri="{FF2B5EF4-FFF2-40B4-BE49-F238E27FC236}">
+                <a16:creationId xmlns:a16="http://schemas.microsoft.com/office/drawing/2014/main" id="{01E4B8A3-A0E2-8B64-09FC-C90A080811A1}"/>
+              </a:ext>
+            </a:extLst>
+          </p:cNvPr>
+          <p:cNvCxnSpPr>
+            <a:stCxn id="30" idx="2"/>
+            <a:endCxn id="31" idx="0"/>
+          </p:cNvCxnSpPr>
+          <p:nvPr/>
+        </p:nvCxnSpPr>
+        <p:spPr>
+          <a:xfrm flipH="1">
+            <a:off x="1496814" y="3918638"/>
+            <a:ext cx="241" cy="208158"/>
+          </a:xfrm>
+          <a:prstGeom prst="straightConnector1">
+            <a:avLst/>
+          </a:prstGeom>
+          <a:ln>
+            <a:tailEnd type="triangle"/>
+          </a:ln>
+        </p:spPr>
+        <p:style>
+          <a:lnRef idx="1">
+            <a:schemeClr val="dk1"/>
+          </a:lnRef>
+          <a:fillRef idx="0">
+            <a:schemeClr val="dk1"/>
+          </a:fillRef>
+          <a:effectRef idx="0">
+            <a:schemeClr val="dk1"/>
+          </a:effectRef>
+          <a:fontRef idx="minor">
+            <a:schemeClr val="tx1"/>
+          </a:fontRef>
+        </p:style>
+      </p:cxnSp>
+      <p:cxnSp>
+        <p:nvCxnSpPr>
+          <p:cNvPr id="63" name="Straight Arrow Connector 62">
+            <a:extLst>
+              <a:ext uri="{FF2B5EF4-FFF2-40B4-BE49-F238E27FC236}">
+                <a16:creationId xmlns:a16="http://schemas.microsoft.com/office/drawing/2014/main" id="{9F3092E2-659F-76AE-C4BD-8257D2AAD818}"/>
+              </a:ext>
+            </a:extLst>
+          </p:cNvPr>
+          <p:cNvCxnSpPr>
+            <a:stCxn id="11" idx="2"/>
+            <a:endCxn id="32" idx="0"/>
+          </p:cNvCxnSpPr>
+          <p:nvPr/>
+        </p:nvCxnSpPr>
+        <p:spPr>
+          <a:xfrm>
+            <a:off x="3025943" y="2109664"/>
+            <a:ext cx="0" cy="281425"/>
+          </a:xfrm>
+          <a:prstGeom prst="straightConnector1">
+            <a:avLst/>
+          </a:prstGeom>
+          <a:ln>
+            <a:tailEnd type="triangle"/>
+          </a:ln>
+        </p:spPr>
+        <p:style>
+          <a:lnRef idx="1">
+            <a:schemeClr val="dk1"/>
+          </a:lnRef>
+          <a:fillRef idx="0">
+            <a:schemeClr val="dk1"/>
+          </a:fillRef>
+          <a:effectRef idx="0">
+            <a:schemeClr val="dk1"/>
+          </a:effectRef>
+          <a:fontRef idx="minor">
+            <a:schemeClr val="tx1"/>
+          </a:fontRef>
+        </p:style>
+      </p:cxnSp>
+      <p:cxnSp>
+        <p:nvCxnSpPr>
+          <p:cNvPr id="65" name="Straight Arrow Connector 64">
+            <a:extLst>
+              <a:ext uri="{FF2B5EF4-FFF2-40B4-BE49-F238E27FC236}">
+                <a16:creationId xmlns:a16="http://schemas.microsoft.com/office/drawing/2014/main" id="{9B4704E5-9DE4-C95F-0405-0DCB76AFBA99}"/>
+              </a:ext>
+            </a:extLst>
+          </p:cNvPr>
+          <p:cNvCxnSpPr>
+            <a:stCxn id="32" idx="2"/>
+            <a:endCxn id="33" idx="0"/>
+          </p:cNvCxnSpPr>
+          <p:nvPr/>
+        </p:nvCxnSpPr>
+        <p:spPr>
+          <a:xfrm>
+            <a:off x="3025943" y="3016731"/>
+            <a:ext cx="0" cy="272707"/>
+          </a:xfrm>
+          <a:prstGeom prst="straightConnector1">
+            <a:avLst/>
+          </a:prstGeom>
+          <a:ln>
+            <a:tailEnd type="triangle"/>
+          </a:ln>
+        </p:spPr>
+        <p:style>
+          <a:lnRef idx="1">
+            <a:schemeClr val="dk1"/>
+          </a:lnRef>
+          <a:fillRef idx="0">
+            <a:schemeClr val="dk1"/>
+          </a:fillRef>
+          <a:effectRef idx="0">
+            <a:schemeClr val="dk1"/>
+          </a:effectRef>
+          <a:fontRef idx="minor">
+            <a:schemeClr val="tx1"/>
+          </a:fontRef>
+        </p:style>
+      </p:cxnSp>
+      <p:cxnSp>
+        <p:nvCxnSpPr>
+          <p:cNvPr id="71" name="Straight Arrow Connector 70">
+            <a:extLst>
+              <a:ext uri="{FF2B5EF4-FFF2-40B4-BE49-F238E27FC236}">
+                <a16:creationId xmlns:a16="http://schemas.microsoft.com/office/drawing/2014/main" id="{632E018B-9B0D-5B74-54B3-BCC3BB455699}"/>
+              </a:ext>
+            </a:extLst>
+          </p:cNvPr>
+          <p:cNvCxnSpPr/>
+          <p:nvPr/>
+        </p:nvCxnSpPr>
+        <p:spPr>
+          <a:xfrm>
+            <a:off x="3025943" y="3915080"/>
+            <a:ext cx="0" cy="211716"/>
+          </a:xfrm>
+          <a:prstGeom prst="straightConnector1">
+            <a:avLst/>
+          </a:prstGeom>
+          <a:ln>
+            <a:tailEnd type="triangle"/>
+          </a:ln>
+        </p:spPr>
+        <p:style>
+          <a:lnRef idx="1">
+            <a:schemeClr val="dk1"/>
+          </a:lnRef>
+          <a:fillRef idx="0">
+            <a:schemeClr val="dk1"/>
+          </a:fillRef>
+          <a:effectRef idx="0">
+            <a:schemeClr val="dk1"/>
+          </a:effectRef>
+          <a:fontRef idx="minor">
+            <a:schemeClr val="tx1"/>
+          </a:fontRef>
+        </p:style>
+      </p:cxnSp>
+      <p:cxnSp>
+        <p:nvCxnSpPr>
+          <p:cNvPr id="75" name="Straight Arrow Connector 74">
+            <a:extLst>
+              <a:ext uri="{FF2B5EF4-FFF2-40B4-BE49-F238E27FC236}">
+                <a16:creationId xmlns:a16="http://schemas.microsoft.com/office/drawing/2014/main" id="{1B8835E0-B82A-59BC-795E-A10C0E9D063C}"/>
+              </a:ext>
+            </a:extLst>
+          </p:cNvPr>
+          <p:cNvCxnSpPr>
+            <a:stCxn id="25" idx="2"/>
+            <a:endCxn id="36" idx="0"/>
+          </p:cNvCxnSpPr>
+          <p:nvPr/>
+        </p:nvCxnSpPr>
+        <p:spPr>
+          <a:xfrm>
+            <a:off x="6083237" y="2109664"/>
+            <a:ext cx="5378" cy="254109"/>
+          </a:xfrm>
+          <a:prstGeom prst="straightConnector1">
+            <a:avLst/>
+          </a:prstGeom>
+          <a:ln>
+            <a:tailEnd type="triangle"/>
+          </a:ln>
+        </p:spPr>
+        <p:style>
+          <a:lnRef idx="1">
+            <a:schemeClr val="dk1"/>
+          </a:lnRef>
+          <a:fillRef idx="0">
+            <a:schemeClr val="dk1"/>
+          </a:fillRef>
+          <a:effectRef idx="0">
+            <a:schemeClr val="dk1"/>
+          </a:effectRef>
+          <a:fontRef idx="minor">
+            <a:schemeClr val="tx1"/>
+          </a:fontRef>
+        </p:style>
+      </p:cxnSp>
+      <p:cxnSp>
+        <p:nvCxnSpPr>
+          <p:cNvPr id="80" name="Straight Arrow Connector 79">
+            <a:extLst>
+              <a:ext uri="{FF2B5EF4-FFF2-40B4-BE49-F238E27FC236}">
+                <a16:creationId xmlns:a16="http://schemas.microsoft.com/office/drawing/2014/main" id="{C0028726-7D86-6A4B-2AB8-107EFF740033}"/>
+              </a:ext>
+            </a:extLst>
+          </p:cNvPr>
+          <p:cNvCxnSpPr>
+            <a:endCxn id="37" idx="0"/>
+          </p:cNvCxnSpPr>
+          <p:nvPr/>
+        </p:nvCxnSpPr>
+        <p:spPr>
+          <a:xfrm>
+            <a:off x="7611884" y="2109664"/>
+            <a:ext cx="0" cy="254110"/>
           </a:xfrm>
           <a:prstGeom prst="straightConnector1">
             <a:avLst/>
